--- a/outputs/N.K._risk_project_management.pptx
+++ b/outputs/N.K._risk_project_management.pptx
@@ -3824,7 +3824,7 @@
                 </a:solidFill>
                 <a:latin typeface="Alegreya Sans"/>
               </a:rPr>
-              <a:t>EXPÉRIENCE PROFESSIONNELLE</a:t>
+              <a:t>PRINCIPALES EXPÉRIENCES PROFESSIONNELLES</a:t>
             </a:r>
           </a:p>
           <a:p>
@@ -5033,7 +5033,7 @@
                 </a:solidFill>
                 <a:latin typeface="Alegreya Sans"/>
               </a:rPr>
-              <a:t>PROFESSIONAL EXPERIENCE</a:t>
+              <a:t>MAIN PROFESSIONAL EXPERIENCE</a:t>
             </a:r>
           </a:p>
           <a:p>
